--- a/lectures/week-03/lecture-en.pptx
+++ b/lectures/week-03/lecture-en.pptx
@@ -16146,7 +16146,7 @@
                 </a:solidFill>
                 <a:latin typeface="Source Han Sans SC"/>
               </a:rPr>
-              <a:t>Theory ~90 min · Lab ~75 min · Quiz &amp; Summary 15 min</a:t>
+              <a:t>Theory ~90 min · Lab 80 min · Quiz &amp; Summary 10 min</a:t>
             </a:r>
           </a:p>
         </p:txBody>
@@ -22309,8 +22309,8 @@
                 </a:solidFill>
                 <a:latin typeface="Source Han Sans SC"/>
               </a:rPr>
-              <a:t>In 75 minutes you make the six-step pipeline actually run:
-implement a custom Dataset and DataLoader, complete exploration, splitting, augmentation and imbalance statistics, and produce a Data Card.</a:t>
+              <a:t>In 80 minutes you make the six-step pipeline actually run:
+sort the cleaning steps by whether they need a statistic, then implement a custom Dataset and DataLoader, complete exploration, splitting, augmentation and imbalance statistics, and produce a Data Card.</a:t>
             </a:r>
           </a:p>
         </p:txBody>
@@ -23241,7 +23241,7 @@
                 </a:solidFill>
                 <a:latin typeface="Source Han Sans SC"/>
               </a:rPr>
-              <a:t>The Six Tasks of Experiment 2</a:t>
+              <a:t>The Seven Tasks of Experiment 2</a:t>
             </a:r>
           </a:p>
         </p:txBody>
@@ -23755,7 +23755,7 @@
                 </a:solidFill>
                 <a:latin typeface="Source Han Sans SC"/>
               </a:rPr>
-              <a:t>B · A reproducible split</a:t>
+              <a:t>B · Clean the raw table (no statistics)</a:t>
             </a:r>
           </a:p>
         </p:txBody>
@@ -23836,7 +23836,7 @@
                 </a:solidFill>
                 <a:latin typeface="Source Han Sans SC"/>
               </a:rPr>
-              <a:t>• Split with a fixed seed and justify random / stratified / time / group</a:t>
+              <a:t>• State a numeric criterion for de-duplication, unit conversion and code unification</a:t>
             </a:r>
           </a:p>
           <a:p>
@@ -23855,7 +23855,7 @@
                 </a:solidFill>
                 <a:latin typeface="Source Han Sans SC"/>
               </a:rPr>
-              <a:t>• Report the size and class ratio of every split</a:t>
+              <a:t>• The predicted removal count must equal the actual one (812 = 812)</a:t>
             </a:r>
           </a:p>
         </p:txBody>
@@ -23984,7 +23984,7 @@
                 </a:solidFill>
                 <a:latin typeface="Source Han Sans SC"/>
               </a:rPr>
-              <a:t>C · Custom Dataset</a:t>
+              <a:t>C · Split, then training-only statistics</a:t>
             </a:r>
           </a:p>
         </p:txBody>
@@ -24065,7 +24065,7 @@
                 </a:solidFill>
                 <a:latin typeface="Source Han Sans SC"/>
               </a:rPr>
-              <a:t>• Implement __len__ and __getitem__ returning (x, y)</a:t>
+              <a:t>• Split with a fixed seed and justify random / stratified / time / group</a:t>
             </a:r>
           </a:p>
           <a:p>
@@ -24084,7 +24084,7 @@
                 </a:solidFill>
                 <a:latin typeface="Source Han Sans SC"/>
               </a:rPr>
-              <a:t>• Verify the shape and dtype of ds[0]</a:t>
+              <a:t>• Report the size and class ratio of every split</a:t>
             </a:r>
           </a:p>
         </p:txBody>
@@ -24213,7 +24213,7 @@
                 </a:solidFill>
                 <a:latin typeface="Source Han Sans SC"/>
               </a:rPr>
-              <a:t>D · DataLoader and augmentation</a:t>
+              <a:t>D · Custom Dataset</a:t>
             </a:r>
           </a:p>
         </p:txBody>
@@ -24294,7 +24294,7 @@
                 </a:solidFill>
                 <a:latin typeface="Source Han Sans SC"/>
               </a:rPr>
-              <a:t>• Set batch_size, shuffle and num_workers with reasons</a:t>
+              <a:t>• Implement __len__ and __getitem__ returning (x, y)</a:t>
             </a:r>
           </a:p>
           <a:p>
@@ -24313,7 +24313,7 @@
                 </a:solidFill>
                 <a:latin typeface="Source Han Sans SC"/>
               </a:rPr>
-              <a:t>• Apply augmentation to train only, with a comparison</a:t>
+              <a:t>• Verify the shape and dtype of ds[0]</a:t>
             </a:r>
           </a:p>
         </p:txBody>
@@ -24442,7 +24442,7 @@
                 </a:solidFill>
                 <a:latin typeface="Source Han Sans SC"/>
               </a:rPr>
-              <a:t>E · Imbalance statistics</a:t>
+              <a:t>E · DataLoader and augmentation</a:t>
             </a:r>
           </a:p>
         </p:txBody>
@@ -24523,7 +24523,7 @@
                 </a:solidFill>
                 <a:latin typeface="Source Han Sans SC"/>
               </a:rPr>
-              <a:t>• Measure class shares, then pick resampling or a cost-sensitive loss</a:t>
+              <a:t>• Set batch_size, shuffle and num_workers with reasons</a:t>
             </a:r>
           </a:p>
           <a:p>
@@ -24542,7 +24542,7 @@
                 </a:solidFill>
                 <a:latin typeface="Source Han Sans SC"/>
               </a:rPr>
-              <a:t>• Show the class distribution before and after</a:t>
+              <a:t>• Apply augmentation to train only, with a comparison</a:t>
             </a:r>
           </a:p>
         </p:txBody>
@@ -24671,7 +24671,7 @@
                 </a:solidFill>
                 <a:latin typeface="Source Han Sans SC"/>
               </a:rPr>
-              <a:t>F · Respect for Data and Privacy</a:t>
+              <a:t>F · Imbalance statistics</a:t>
             </a:r>
           </a:p>
         </p:txBody>
@@ -24724,6 +24724,235 @@
         <p:spPr>
           <a:xfrm>
             <a:off x="8228879" y="3823200"/>
+            <a:ext cx="2940839" cy="928799"/>
+          </a:xfrm>
+          <a:prstGeom prst="rect">
+            <a:avLst/>
+          </a:prstGeom>
+          <a:noFill/>
+        </p:spPr>
+        <p:txBody>
+          <a:bodyPr wrap="square" anchor="t" lIns="0" rIns="0" tIns="0" bIns="0">
+            <a:spAutoFit/>
+          </a:bodyPr>
+          <a:lstStyle/>
+          <a:p>
+            <a:pPr algn="l">
+              <a:lnSpc>
+                <a:spcPct val="140000"/>
+              </a:lnSpc>
+              <a:spcAft>
+                <a:spcPts val="400"/>
+              </a:spcAft>
+            </a:pPr>
+            <a:r>
+              <a:rPr sz="1200" b="0" i="0">
+                <a:solidFill>
+                  <a:srgbClr val="1F2937"/>
+                </a:solidFill>
+                <a:latin typeface="Source Han Sans SC"/>
+              </a:rPr>
+              <a:t>• Measure class shares, then pick resampling or a cost-sensitive loss</a:t>
+            </a:r>
+          </a:p>
+          <a:p>
+            <a:pPr algn="l">
+              <a:lnSpc>
+                <a:spcPct val="140000"/>
+              </a:lnSpc>
+              <a:spcAft>
+                <a:spcPts val="400"/>
+              </a:spcAft>
+            </a:pPr>
+            <a:r>
+              <a:rPr sz="1200" b="0" i="0">
+                <a:solidFill>
+                  <a:srgbClr val="1F2937"/>
+                </a:solidFill>
+                <a:latin typeface="Source Han Sans SC"/>
+              </a:rPr>
+              <a:t>• Show the class distribution before and after</a:t>
+            </a:r>
+          </a:p>
+        </p:txBody>
+      </p:sp>
+      <p:sp>
+        <p:nvSpPr>
+          <p:cNvPr id="40" name="Rectangle 39"/>
+          <p:cNvSpPr/>
+          <p:nvPr/>
+        </p:nvSpPr>
+        <p:spPr>
+          <a:xfrm>
+            <a:off x="799200" y="5112000"/>
+            <a:ext cx="3387239" cy="1692000"/>
+          </a:xfrm>
+          <a:prstGeom prst="rect">
+            <a:avLst/>
+          </a:prstGeom>
+          <a:solidFill>
+            <a:srgbClr val="F0F5FC"/>
+          </a:solidFill>
+          <a:ln w="9525">
+            <a:solidFill>
+              <a:srgbClr val="E5E7EB"/>
+            </a:solidFill>
+          </a:ln>
+          <a:effectLst/>
+        </p:spPr>
+        <p:style>
+          <a:lnRef idx="1">
+            <a:schemeClr val="accent1"/>
+          </a:lnRef>
+          <a:fillRef idx="3">
+            <a:schemeClr val="accent1"/>
+          </a:fillRef>
+          <a:effectRef idx="2">
+            <a:schemeClr val="accent1"/>
+          </a:effectRef>
+          <a:fontRef idx="minor">
+            <a:schemeClr val="lt1"/>
+          </a:fontRef>
+        </p:style>
+        <p:txBody>
+          <a:bodyPr rtlCol="0" anchor="ctr" wrap="square"/>
+          <a:lstStyle/>
+          <a:p>
+            <a:pPr algn="ctr"/>
+          </a:p>
+        </p:txBody>
+      </p:sp>
+      <p:sp>
+        <p:nvSpPr>
+          <p:cNvPr id="41" name="Rectangle 40"/>
+          <p:cNvSpPr/>
+          <p:nvPr/>
+        </p:nvSpPr>
+        <p:spPr>
+          <a:xfrm>
+            <a:off x="799200" y="5112000"/>
+            <a:ext cx="32400" cy="1692000"/>
+          </a:xfrm>
+          <a:prstGeom prst="rect">
+            <a:avLst/>
+          </a:prstGeom>
+          <a:solidFill>
+            <a:srgbClr val="3D7BD9"/>
+          </a:solidFill>
+          <a:ln>
+            <a:noFill/>
+          </a:ln>
+          <a:effectLst/>
+        </p:spPr>
+        <p:style>
+          <a:lnRef idx="1">
+            <a:schemeClr val="accent1"/>
+          </a:lnRef>
+          <a:fillRef idx="3">
+            <a:schemeClr val="accent1"/>
+          </a:fillRef>
+          <a:effectRef idx="2">
+            <a:schemeClr val="accent1"/>
+          </a:effectRef>
+          <a:fontRef idx="minor">
+            <a:schemeClr val="lt1"/>
+          </a:fontRef>
+        </p:style>
+        <p:txBody>
+          <a:bodyPr rtlCol="0" anchor="ctr" wrap="square"/>
+          <a:lstStyle/>
+          <a:p>
+            <a:pPr algn="ctr"/>
+          </a:p>
+        </p:txBody>
+      </p:sp>
+      <p:sp>
+        <p:nvSpPr>
+          <p:cNvPr id="42" name="TextBox 41"/>
+          <p:cNvSpPr txBox="1"/>
+          <p:nvPr/>
+        </p:nvSpPr>
+        <p:spPr>
+          <a:xfrm>
+            <a:off x="1022400" y="5299200"/>
+            <a:ext cx="2940839" cy="223200"/>
+          </a:xfrm>
+          <a:prstGeom prst="rect">
+            <a:avLst/>
+          </a:prstGeom>
+          <a:noFill/>
+        </p:spPr>
+        <p:txBody>
+          <a:bodyPr wrap="square" anchor="t" lIns="0" rIns="0" tIns="0" bIns="0">
+            <a:spAutoFit/>
+          </a:bodyPr>
+          <a:lstStyle/>
+          <a:p>
+            <a:pPr algn="l">
+              <a:lnSpc>
+                <a:spcPct val="125000"/>
+              </a:lnSpc>
+            </a:pPr>
+            <a:r>
+              <a:rPr sz="1550" b="1" i="0">
+                <a:solidFill>
+                  <a:srgbClr val="0E3F8C"/>
+                </a:solidFill>
+                <a:latin typeface="Source Han Sans SC"/>
+              </a:rPr>
+              <a:t>G · Respect for Data and Privacy</a:t>
+            </a:r>
+          </a:p>
+        </p:txBody>
+      </p:sp>
+      <p:sp>
+        <p:nvSpPr>
+          <p:cNvPr id="43" name="TextBox 42"/>
+          <p:cNvSpPr txBox="1"/>
+          <p:nvPr/>
+        </p:nvSpPr>
+        <p:spPr>
+          <a:xfrm>
+            <a:off x="1022400" y="5529600"/>
+            <a:ext cx="2940839" cy="151200"/>
+          </a:xfrm>
+          <a:prstGeom prst="rect">
+            <a:avLst/>
+          </a:prstGeom>
+          <a:noFill/>
+        </p:spPr>
+        <p:txBody>
+          <a:bodyPr wrap="square" anchor="t" lIns="0" rIns="0" tIns="0" bIns="0">
+            <a:spAutoFit/>
+          </a:bodyPr>
+          <a:lstStyle/>
+          <a:p>
+            <a:pPr algn="l">
+              <a:lnSpc>
+                <a:spcPct val="125000"/>
+              </a:lnSpc>
+            </a:pPr>
+            <a:r>
+              <a:rPr sz="1100" b="1" i="0">
+                <a:solidFill>
+                  <a:srgbClr val="3D7BD9"/>
+                </a:solidFill>
+                <a:latin typeface="Source Han Sans SC"/>
+              </a:rPr>
+              <a:t>task G</a:t>
+            </a:r>
+          </a:p>
+        </p:txBody>
+      </p:sp>
+      <p:sp>
+        <p:nvSpPr>
+          <p:cNvPr id="44" name="TextBox 43"/>
+          <p:cNvSpPr txBox="1"/>
+          <p:nvPr/>
+        </p:nvSpPr>
+        <p:spPr>
+          <a:xfrm>
+            <a:off x="1022400" y="5731200"/>
             <a:ext cx="2940839" cy="928799"/>
           </a:xfrm>
           <a:prstGeom prst="rect">
@@ -25355,7 +25584,7 @@
                 </a:solidFill>
                 <a:latin typeface="Menlo"/>
               </a:rPr>
-              <a:t>- 12,480 samples · 12 features · 5 classes</a:t>
+              <a:t>- 11,668 unique rows (12,480 raw, 812 duplicates removed) · 10 features · 5 classes</a:t>
             </a:r>
           </a:p>
           <a:p>
@@ -25435,7 +25664,7 @@
                 </a:solidFill>
                 <a:latin typeface="Menlo"/>
               </a:rPr>
-              <a:t>- Missing: age 3.2% -&gt; imputed with the training median</a:t>
+              <a:t>- Missing: age 3.2% (25% in the rare class vs 2.3% elsewhere) -&gt; training median</a:t>
             </a:r>
           </a:p>
           <a:p>
@@ -25451,7 +25680,7 @@
                 </a:solidFill>
                 <a:latin typeface="Menlo"/>
               </a:rPr>
-              <a:t>- Outliers: 3 -&gt; clipped to the 1/99 percentiles</a:t>
+              <a:t>- Unit mixed: 935 Fahrenheit readings -&gt; converted to Celsius, not deleted</a:t>
             </a:r>
           </a:p>
           <a:p>
@@ -25467,6 +25696,38 @@
                 </a:solidFill>
                 <a:latin typeface="Menlo"/>
               </a:rPr>
+              <a:t>- Codes: material_code in 10 spellings -&gt; normalised to 5 and encoded</a:t>
+            </a:r>
+          </a:p>
+          <a:p>
+            <a:pPr algn="l">
+              <a:lnSpc>
+                <a:spcPct val="128000"/>
+              </a:lnSpc>
+            </a:pPr>
+            <a:r>
+              <a:rPr sz="1100" b="0" i="0">
+                <a:solidFill>
+                  <a:srgbClr val="E2E8F0"/>
+                </a:solidFill>
+                <a:latin typeface="Menlo"/>
+              </a:rPr>
+              <a:t>- Outliers: 35 stuck-sensor readings -&gt; clipped to the training 1st/99th pct</a:t>
+            </a:r>
+          </a:p>
+          <a:p>
+            <a:pPr algn="l">
+              <a:lnSpc>
+                <a:spcPct val="128000"/>
+              </a:lnSpc>
+            </a:pPr>
+            <a:r>
+              <a:rPr sz="1100" b="0" i="0">
+                <a:solidFill>
+                  <a:srgbClr val="E2E8F0"/>
+                </a:solidFill>
+                <a:latin typeface="Menlo"/>
+              </a:rPr>
               <a:t>- Duplicates: de-duplicated on batch_id + timestamp, 812 gone</a:t>
             </a:r>
           </a:p>
@@ -25531,7 +25792,7 @@
                 </a:solidFill>
                 <a:latin typeface="Menlo"/>
               </a:rPr>
-              <a:t>- Train: horizontal flip + Gaussian noise; val/test: none</a:t>
+              <a:t>- Train: Gaussian noise; val/test: none</a:t>
             </a:r>
           </a:p>
           <a:p>
